--- a/classes/parte-6-sistemas-de-recomendacion/219-recomendadores-hibridos/clase-219-recomendadores-hibridos-presentacion.pptx
+++ b/classes/parte-6-sistemas-de-recomendacion/219-recomendadores-hibridos/clase-219-recomendadores-hibridos-presentacion.pptx
@@ -3272,7 +3272,7 @@
                 </a:solidFill>
                 <a:latin typeface="Segoe UI"/>
               </a:rPr>
-              <a:t>Parte: 6 — Sistemas de Recomendación · Fuente: Burke, Hybrid Recommender Systems: Survey and Experiments (UMUAI 2002) + Kula, Metadata Embeddings for User and Item Cold-start Recommendations (LightFM, 2015).  Duración estimada: 75 min.</a:t>
+              <a:t>Parte: 6 — Sistemas de Recomendación · Fuente: Burke, Hybrid Recommender Systems: Survey and Experiments (UMUAI 2002) + Kula, Metadata Embeddings for User and Item Cold-start Recommendations (LightFM, 2015).  Duración estimada: 75 min. · Nivel: Intermedio-Avanzado</a:t>
             </a:r>
           </a:p>
         </p:txBody>
@@ -3581,7 +3581,7 @@
                 </a:solidFill>
                 <a:latin typeface="Segoe UI"/>
               </a:rPr>
-              <a:t>Parte: 6 — Sistemas de Recomendación · Fuente: Burke, Hybrid Recommender Systems: Survey and Experiments (UMUAI 2002) + Kula, Metadata Embeddings for User and Item Cold-start Recommendations (LightFM, 2015).  Duración estimada: 75 min.</a:t>
+              <a:t>Parte: 6 — Sistemas de Recomendación · Fuente: Burke, Hybrid Recommender Systems: Survey and Experiments (UMUAI 2002) + Kula, Metadata Embeddings for User and Item Cold-start Recommendations (LightFM, 2015).  Duración estimada: 75 min. · Nivel: Intermedio-Avanzado</a:t>
             </a:r>
           </a:p>
         </p:txBody>
